--- a/labs/lab06/slides/slides.pptx
+++ b/labs/lab06/slides/slides.pptx
@@ -5,7 +5,7 @@
     <p:sldMasterId id="2147483696" r:id="rId1"/>
   </p:sldMasterIdLst>
   <p:notesMasterIdLst>
-    <p:notesMasterId r:id="rId22"/>
+    <p:notesMasterId r:id="rId24"/>
   </p:notesMasterIdLst>
   <p:sldIdLst>
     <p:sldId id="256" r:id="rId2"/>
@@ -28,6 +28,8 @@
     <p:sldId id="273" r:id="rId19"/>
     <p:sldId id="274" r:id="rId20"/>
     <p:sldId id="275" r:id="rId21"/>
+    <p:sldId id="276" r:id="rId22"/>
+    <p:sldId id="277" r:id="rId23"/>
   </p:sldIdLst>
   <p:sldSz cx="12192000" cy="6858000"/>
   <p:notesSz cx="6858000" cy="9144000"/>
@@ -532,7 +534,7 @@
             </a:pPr>
             <a:r>
               <a:rPr/>
-              <a:t>Students build the walkthrough dataset from the worksheet, so there is no separate data file to download. Ask them to keep the worksheet, SPSS data window, and syntax window open.</a:t>
+              <a:t>Have students open the worksheet and SPSS. They will enter the walkthrough data themselves. The four guides cover the operations used in this lab.</a:t>
             </a:r>
           </a:p>
         </p:txBody>
@@ -614,7 +616,7 @@
             </a:pPr>
             <a:r>
               <a:rPr/>
-              <a:t>Compute into new variables rather than overwriting the original meter values. The valid sample size should remain unchanged.</a:t>
+              <a:t>Keep the original meter variables. Missing heights should stay missing after conversion; changing units does not supply missing data.</a:t>
             </a:r>
           </a:p>
         </p:txBody>
@@ -696,7 +698,7 @@
             </a:pPr>
             <a:r>
               <a:rPr/>
-              <a:t>Pause here and compare the two scales. The valid sample size stays the same, while the numerical values change from meters to inches.</a:t>
+              <a:t>This table shows Clark’s height only. Check Lois’s height separately: both her original and converted variables should have nine valid cases and two missing.</a:t>
             </a:r>
           </a:p>
         </p:txBody>
@@ -778,7 +780,7 @@
             </a:pPr>
             <a:r>
               <a:rPr/>
-              <a:t>Add variable labels and value labels after running the transformations. Verify each new variable with frequencies before moving to the next one.</a:t>
+              <a:t>Follow worksheet steps 4–6 one at a time. For clark_grp, the second group includes exactly 72 inches. For height_gap, the middle group includes both 6 and 8 inches. Keep missing values missing and verify labels and frequencies after each step.</a:t>
             </a:r>
           </a:p>
         </p:txBody>
@@ -860,7 +862,7 @@
             </a:pPr>
             <a:r>
               <a:rPr/>
-              <a:t>Filter rather than delete excluded cases. Save the selection command in syntax so the active sample can be reconstructed.</a:t>
+              <a:t>Filter the cases rather than deleting them. The diagonal lines in Data View show which rows are excluded from the next analyses.</a:t>
             </a:r>
           </a:p>
         </p:txBody>
@@ -942,7 +944,7 @@
             </a:pPr>
             <a:r>
               <a:rPr/>
-              <a:t>No active case should have a release year before 1976. If the total is not nine, return to the filter syntax before summarizing variables.</a:t>
+              <a:t>Check that the active years are all after 1975. If the total differs, check the entered years and filter before computing summaries.</a:t>
             </a:r>
           </a:p>
         </p:txBody>
@@ -1024,7 +1026,7 @@
             </a:pPr>
             <a:r>
               <a:rPr/>
-              <a:t>Run all requested summaries from saved syntax. Interpret means only for quantitative variables; use counts and percentages for categories.</a:t>
+              <a:t>The worksheet asks for the mean, SD, and SEM for every entered and created variable. Ask students to decide whether each mean is interpretable using the checker’s variable-type choices.</a:t>
             </a:r>
           </a:p>
         </p:txBody>
@@ -1106,7 +1108,7 @@
             </a:pPr>
             <a:r>
               <a:rPr/>
-              <a:t>Enter the requested values in the homework checker. Explain why the output has seven valid and two missing cases within the nine-case filtered sample.</a:t>
+              <a:t>Ask why there are fewer valid height differences than selected cases. Students should use their own output in the walkthrough checker, then save a screenshot with every answer correct.</a:t>
             </a:r>
           </a:p>
         </p:txBody>
@@ -1188,7 +1190,7 @@
             </a:pPr>
             <a:r>
               <a:rPr/>
-              <a:t>Students should repeat the same one-operation, label, verify sequence. Before saving, return Select Cases to All cases and save both the data and syntax files.</a:t>
+              <a:t>Use the worksheet’s Table 1 template and the filtered output. Include each level of clark_grp and height_gap. Before the take-home section, return Select Cases to All cases and save the data and syntax.</a:t>
             </a:r>
           </a:p>
         </p:txBody>
@@ -1210,7 +1212,7 @@
           <a:p>
             <a:fld id="{18BDFEC3-8487-43E8-A154-7C12CBC1FFF2}" type="slidenum">
               <a:rPr lang="en-US"/>
-              <a:t>18</a:t>
+              <a:t>20</a:t>
             </a:fld>
             <a:endParaRPr lang="en-US"/>
           </a:p>
@@ -1270,7 +1272,7 @@
             </a:pPr>
             <a:r>
               <a:rPr/>
-              <a:t>This table is generated with create_apa_univariates_table(), the same psych350lab reporting workflow used by the SPSS handouts. The worksheet template follows the same rule: M and SD for quantitative variables; N and percent for categorical levels.</a:t>
+              <a:t>Add the ratings to the saved walkthrough dataset, keeping the same row order. Work through the transformations in the worksheet’s order and check each result. Declare −99 missing before calculating the ratings summaries.</a:t>
             </a:r>
           </a:p>
         </p:txBody>
@@ -1292,7 +1294,7 @@
           <a:p>
             <a:fld id="{18BDFEC3-8487-43E8-A154-7C12CBC1FFF2}" type="slidenum">
               <a:rPr lang="en-US"/>
-              <a:t>19</a:t>
+              <a:t>21</a:t>
             </a:fld>
             <a:endParaRPr lang="en-US"/>
           </a:p>
@@ -1352,7 +1354,7 @@
             </a:pPr>
             <a:r>
               <a:rPr/>
-              <a:t>The final slides deliberately focus on the report. Remind students that −99 must be declared missing before any ratings summaries are computed.</a:t>
+              <a:t>Check that both sections’ checker screenshots are in the worksheet. Reset Select Cases to All cases and save both files; students will need the dataset in the next lab.</a:t>
             </a:r>
           </a:p>
         </p:txBody>
@@ -1374,7 +1376,7 @@
           <a:p>
             <a:fld id="{18BDFEC3-8487-43E8-A154-7C12CBC1FFF2}" type="slidenum">
               <a:rPr lang="en-US"/>
-              <a:t>20</a:t>
+              <a:t>22</a:t>
             </a:fld>
             <a:endParaRPr lang="en-US"/>
           </a:p>
@@ -1434,7 +1436,7 @@
             </a:pPr>
             <a:r>
               <a:rPr/>
-              <a:t>SPSS separates the data and commands into different windows. The Data Editor holds the working dataset; the Syntax Editor records exactly what students asked SPSS to do.</a:t>
+              <a:t>The Data Editor holds the dataset. The Syntax Editor keeps the commands: choose Paste in a dialog, then run and save the syntax.</a:t>
             </a:r>
           </a:p>
         </p:txBody>
@@ -1516,7 +1518,7 @@
             </a:pPr>
             <a:r>
               <a:rPr/>
-              <a:t>The Output Viewer accumulates tables, charts, warnings, and processing notes. This image is cropped to the table students will read during this lab.</a:t>
+              <a:t>The Output Viewer collects tables, charts, and messages. Use this table to show where results appear; return to its values after the walkthrough.</a:t>
             </a:r>
           </a:p>
         </p:txBody>
@@ -1598,7 +1600,7 @@
             </a:pPr>
             <a:r>
               <a:rPr/>
-              <a:t>Both views belong to the same Data Editor. Define names, labels, value labels, and missing values in Variable View. Then switch to Data View to enter or inspect each case. Point out the two tabs at the lower left of both screenshots.</a:t>
+              <a:t>Define variable settings in Variable View, then enter one case per row in Data View. Point out the tabs at the lower left.</a:t>
             </a:r>
           </a:p>
         </p:txBody>
@@ -1680,7 +1682,7 @@
             </a:pPr>
             <a:r>
               <a:rPr/>
-              <a:t>Keep the relevant handout visible while working. In SPSS dialog boxes, choose Paste instead of OK whenever possible. SPSS sends the command to the Syntax Editor; students can then run it, save the syntax file, and reproduce or repair the analysis without starting over.</a:t>
+              <a:t>Keep the relevant guide open. Pasting and saving syntax lets students rerun a step or find an error without reconstructing every click.</a:t>
             </a:r>
           </a:p>
         </p:txBody>
@@ -1762,7 +1764,7 @@
             </a:pPr>
             <a:r>
               <a:rPr/>
-              <a:t>This is the organizing idea for the lab. The worksheet repeats the same sequence in the take-home section.</a:t>
+              <a:t>Have students check each operation before starting the next. Labels and frequency tables make errors easier to spot.</a:t>
             </a:r>
           </a:p>
         </p:txBody>
@@ -1844,7 +1846,7 @@
             </a:pPr>
             <a:r>
               <a:rPr/>
-              <a:t>The homework checker asks whether a mean is meaningful. Type, clark_grp, and height_gap remain categorical even though SPSS stores their values as numbers.</a:t>
+              <a:t>These are the reporting choices for the worksheet tables. The checker separately asks whether a mean is interpretable and distinguishes quantitative, binary, multiple-category, and ID variables. Ask students to explain their choices.</a:t>
             </a:r>
           </a:p>
         </p:txBody>
@@ -1926,7 +1928,7 @@
             </a:pPr>
             <a:r>
               <a:rPr/>
-              <a:t>Use readable labels, suitable decimals, and the worksheet’s type codes. A value of −99 is a sentinel code, not a real measurement.</a:t>
+              <a:t>Use the worksheet’s variable names and type codes. Declare −99 missing before computing anything, so SPSS does not treat it as an actor’s height.</a:t>
             </a:r>
           </a:p>
         </p:txBody>
@@ -2008,7 +2010,7 @@
             </a:pPr>
             <a:r>
               <a:rPr/>
-              <a:t>Run a frequency table for type before transforming anything. The total and category counts should match the displayed output.</a:t>
+              <a:t>Run frequencies for type and compare the counts with the worksheet. If they differ, check the entered rows and value labels before continuing.</a:t>
             </a:r>
           </a:p>
         </p:txBody>
@@ -3299,8 +3301,8 @@
         </p:nvSpPr>
         <p:spPr>
           <a:xfrm>
-            <a:off x="1583436" y="2313433"/>
-            <a:ext cx="4270248" cy="704087"/>
+            <a:off x="1097280" y="2313433"/>
+            <a:ext cx="4907280" cy="548640"/>
           </a:xfrm>
         </p:spPr>
         <p:txBody>
@@ -3372,8 +3374,8 @@
         </p:nvSpPr>
         <p:spPr>
           <a:xfrm>
-            <a:off x="1583436" y="3143250"/>
-            <a:ext cx="4270248" cy="2596776"/>
+            <a:off x="1097280" y="2926080"/>
+            <a:ext cx="4907280" cy="3177540"/>
           </a:xfrm>
         </p:spPr>
         <p:txBody>
@@ -3429,8 +3431,8 @@
         </p:nvSpPr>
         <p:spPr>
           <a:xfrm>
-            <a:off x="6338316" y="3143250"/>
-            <a:ext cx="4253484" cy="2596776"/>
+            <a:off x="6187440" y="2926080"/>
+            <a:ext cx="4907280" cy="3177540"/>
           </a:xfrm>
         </p:spPr>
         <p:txBody>
@@ -3490,8 +3492,8 @@
         </p:nvSpPr>
         <p:spPr>
           <a:xfrm>
-            <a:off x="6338316" y="2313433"/>
-            <a:ext cx="4270248" cy="704087"/>
+            <a:off x="6187440" y="2313433"/>
+            <a:ext cx="4907280" cy="548640"/>
           </a:xfrm>
         </p:spPr>
         <p:txBody>
@@ -3626,7 +3628,12 @@
             <p:ph type="title"/>
           </p:nvPr>
         </p:nvSpPr>
-        <p:spPr/>
+        <p:spPr>
+          <a:xfrm>
+            <a:off x="1097280" y="964692"/>
+            <a:ext cx="9997440" cy="1188720"/>
+          </a:xfrm>
+        </p:spPr>
         <p:txBody>
           <a:bodyPr/>
           <a:lstStyle/>
@@ -5311,14 +5318,14 @@
             </a:pPr>
             <a:r>
               <a:rPr/>
-              <a:t>9 Enter 11 rows and confirm the type counts</a:t>
+              <a:t>9 Check the 11 entered cases</a:t>
             </a:r>
           </a:p>
         </p:txBody>
       </p:sp>
       <p:pic>
         <p:nvPicPr>
-          <p:cNvPr descr="SPSS-style frequency table for media type showing 11 entered cases: 5 films, 5 television shows, and 1 serial" id="0" name="Picture 1"/>
+          <p:cNvPr descr="Media-type frequencies for 11 valid cases: Film, 5 (45.5%); TV Show, 5 (45.5%); Serial, 1 (9.1%). Percent and valid percent agree; cumulative percentages are 45.5%, 90.9%, and 100%" id="0" name="Picture 1"/>
           <p:cNvPicPr>
             <a:picLocks noGrp="1" noChangeAspect="1"/>
           </p:cNvPicPr>
@@ -5378,7 +5385,7 @@
             <a:pPr lvl="0"/>
             <a:r>
               <a:rPr/>
-              <a:t>Missing values remain −99</a:t>
+              <a:t>Declare −99 missing</a:t>
             </a:r>
           </a:p>
           <a:p>
@@ -5441,7 +5448,7 @@
             </a:pPr>
             <a:r>
               <a:rPr/>
-              <a:t>10 Compute both heights</a:t>
+              <a:t>10 Convert both heights to inches</a:t>
             </a:r>
           </a:p>
         </p:txBody>
@@ -5524,14 +5531,14 @@
             </a:pPr>
             <a:r>
               <a:rPr/>
-              <a:t>11 Verify 11 valid cases after conversion</a:t>
+              <a:t>11 Check the converted heights</a:t>
             </a:r>
           </a:p>
         </p:txBody>
       </p:sp>
       <p:pic>
         <p:nvPicPr>
-          <p:cNvPr descr="SPSS-style Descriptive Statistics output comparing Clark actor height in meters with the computed height in inches; both variables have 11 valid cases" id="0" name="Picture 1"/>
+          <p:cNvPr descr="Clark height descriptives before filtering, with 11 valid cases in each column. Meters: mean 1.86, SD 0.04, SE 0.01, minimum 1.81, maximum 1.93. Inches: mean 73.37, SD 1.68, SE 0.51, minimum 71.26, maximum 75.98" id="0" name="Picture 1"/>
           <p:cNvPicPr>
             <a:picLocks noGrp="1" noChangeAspect="1"/>
           </p:cNvPicPr>
@@ -5545,7 +5552,7 @@
         </p:blipFill>
         <p:spPr bwMode="auto">
           <a:xfrm>
-            <a:off x="1092200" y="2984500"/>
+            <a:off x="1092200" y="2730500"/>
             <a:ext cx="9994900" cy="2387600"/>
           </a:xfrm>
           <a:prstGeom prst="rect">
@@ -5559,6 +5566,46 @@
           </a:ln>
         </p:spPr>
       </p:pic>
+      <p:sp>
+        <p:nvSpPr>
+          <p:cNvPr id="1" name="TextBox 3"/>
+          <p:cNvSpPr txBox="1"/>
+          <p:nvPr>
+            <p:ph idx="1"/>
+          </p:nvPr>
+        </p:nvSpPr>
+        <p:spPr>
+          <a:xfrm>
+            <a:off x="1092200" y="5219700"/>
+            <a:ext cx="9994900" cy="508000"/>
+          </a:xfrm>
+          <a:prstGeom prst="rect">
+            <a:avLst/>
+          </a:prstGeom>
+          <a:noFill/>
+        </p:spPr>
+        <p:txBody>
+          <a:bodyPr/>
+          <a:lstStyle/>
+          <a:p>
+            <a:pPr lvl="0" indent="0" marL="0" algn="ctr">
+              <a:buNone/>
+            </a:pPr>
+            <a:r>
+              <a:rPr/>
+              <a:t>Check </a:t>
+            </a:r>
+            <a:r>
+              <a:rPr b="1"/>
+              <a:t>Lois’s height</a:t>
+            </a:r>
+            <a:r>
+              <a:rPr/>
+              <a:t> separately</a:t>
+            </a:r>
+          </a:p>
+        </p:txBody>
+      </p:sp>
     </p:spTree>
   </p:cSld>
 </p:sld>
@@ -5606,7 +5653,7 @@
             </a:pPr>
             <a:r>
               <a:rPr/>
-              <a:t>12 Create the grouped variables</a:t>
+              <a:t>12 Create the next three variables</a:t>
             </a:r>
           </a:p>
         </p:txBody>
@@ -5626,22 +5673,60 @@
           <a:bodyPr/>
           <a:lstStyle/>
           <a:p>
-            <a:pPr lvl="0" indent="0">
+            <a:pPr lvl="0" indent="0" marL="0">
               <a:buNone/>
             </a:pPr>
             <a:r>
-              <a:rPr>
-                <a:latin typeface="Courier"/>
-              </a:rPr>
-              <a:t>RECODE clark_height_in
-  (LO THRU 71.999 = 1) (72 THRU HI = 2)
-  INTO clark_grp.
-COMPUTE height_diff =
-  clark_height_in - lois_height_in.
-RECODE height_diff
-  (LO THRU 5.999 = 1) (6 THRU 8 = 2)
-  (8.001 THRU HI = 3) INTO height_gap.
-EXECUTE.</a:t>
+              <a:rPr/>
+              <a:t>[Walk-through steps 4–6]</a:t>
+            </a:r>
+          </a:p>
+          <a:p>
+            <a:pPr lvl="0" indent="-457200" marL="457200">
+              <a:buAutoNum type="arabicPeriod"/>
+            </a:pPr>
+            <a:r>
+              <a:rPr b="1"/>
+              <a:t>clark_grp:</a:t>
+            </a:r>
+            <a:r>
+              <a:rPr/>
+              <a:t> group Clark’s height using the worksheet’s cutoff</a:t>
+            </a:r>
+          </a:p>
+          <a:p>
+            <a:pPr lvl="0" indent="-457200" marL="457200">
+              <a:buAutoNum type="arabicPeriod"/>
+            </a:pPr>
+            <a:r>
+              <a:rPr b="1"/>
+              <a:t>height_diff:</a:t>
+            </a:r>
+            <a:r>
+              <a:rPr/>
+              <a:t> compute Clark’s height minus Lois’s, in inches</a:t>
+            </a:r>
+          </a:p>
+          <a:p>
+            <a:pPr lvl="0" indent="-457200" marL="457200">
+              <a:buAutoNum type="arabicPeriod"/>
+            </a:pPr>
+            <a:r>
+              <a:rPr b="1"/>
+              <a:t>height_gap:</a:t>
+            </a:r>
+            <a:r>
+              <a:rPr/>
+              <a:t> group the height differences</a:t>
+            </a:r>
+          </a:p>
+          <a:p>
+            <a:pPr lvl="0" indent="0" marL="0">
+              <a:buNone/>
+            </a:pPr>
+            <a:r>
+              <a:rPr/>
+              <a:t>Add labels and check frequencies after each step</a:t>
             </a:r>
           </a:p>
         </p:txBody>
@@ -5783,7 +5868,7 @@
       </p:sp>
       <p:pic>
         <p:nvPicPr>
-          <p:cNvPr descr="SPSS-style frequency table after selecting year greater than 1975; all nine active cases have release years from 1978 through 2025" id="0" name="Picture 1"/>
+          <p:cNvPr descr="Year frequencies after selecting year greater than 1975: one valid case each in 1978, 1988, 1989, 1993, 2001, 2006, 2013, 2021, and 2025. Each is 11.1% of nine cases; percent and valid percent agree" id="0" name="Picture 1"/>
           <p:cNvPicPr>
             <a:picLocks noGrp="1" noChangeAspect="1"/>
           </p:cNvPicPr>
@@ -5952,7 +6037,7 @@
       </p:sp>
       <p:pic>
         <p:nvPicPr>
-          <p:cNvPr descr="SPSS-style Statistics output for height difference after the walkthrough filter, showing 7 valid cases, 2 missing cases, a mean of 8.21 inches, and a standard deviation of 2.65 inches" id="0" name="Picture 1"/>
+          <p:cNvPr descr="Height difference after filtering: 7 valid cases and 2 missing; mean 8.21 inches, standard error 1.000, SD 2.645, minimum 5.12, maximum 12.99" id="0" name="Picture 1"/>
           <p:cNvPicPr>
             <a:picLocks noGrp="1" noChangeAspect="1"/>
           </p:cNvPicPr>
@@ -6027,7 +6112,7 @@
             </a:pPr>
             <a:r>
               <a:rPr/>
-              <a:t>17 Repeat the pattern at home</a:t>
+              <a:t>17 Complete Table 1</a:t>
             </a:r>
           </a:p>
         </p:txBody>
@@ -6047,80 +6132,12 @@
           <a:bodyPr/>
           <a:lstStyle/>
           <a:p>
-            <a:pPr lvl="0" indent="-457200" marL="457200">
-              <a:buAutoNum type="arabicPeriod"/>
+            <a:pPr lvl="0" indent="0" marL="0">
+              <a:buNone/>
             </a:pPr>
             <a:r>
               <a:rPr/>
-              <a:t>Enter the ratings variables.</a:t>
-            </a:r>
-          </a:p>
-          <a:p>
-            <a:pPr lvl="0" indent="-457200" marL="457200">
-              <a:buAutoNum type="arabicPeriod"/>
-            </a:pPr>
-            <a:r>
-              <a:rPr/>
-              <a:t>Recode </a:t>
-            </a:r>
-            <a:r>
-              <a:rPr b="1"/>
-              <a:t>tomatometer</a:t>
-            </a:r>
-            <a:r>
-              <a:rPr/>
-              <a:t> and </a:t>
-            </a:r>
-            <a:r>
-              <a:rPr b="1"/>
-              <a:t>popular</a:t>
-            </a:r>
-            <a:r>
-              <a:rPr/>
-              <a:t>.</a:t>
-            </a:r>
-          </a:p>
-          <a:p>
-            <a:pPr lvl="0" indent="-457200" marL="457200">
-              <a:buAutoNum type="arabicPeriod"/>
-            </a:pPr>
-            <a:r>
-              <a:rPr/>
-              <a:t>Compute </a:t>
-            </a:r>
-            <a:r>
-              <a:rPr b="1"/>
-              <a:t>rt_avg</a:t>
-            </a:r>
-            <a:r>
-              <a:rPr/>
-              <a:t> and weighted </a:t>
-            </a:r>
-            <a:r>
-              <a:rPr b="1"/>
-              <a:t>rt_diff</a:t>
-            </a:r>
-            <a:r>
-              <a:rPr/>
-              <a:t>.</a:t>
-            </a:r>
-          </a:p>
-          <a:p>
-            <a:pPr lvl="0" indent="-457200" marL="457200">
-              <a:buAutoNum type="arabicPeriod"/>
-            </a:pPr>
-            <a:r>
-              <a:rPr/>
-              <a:t>Select cases with at least five critic scores.</a:t>
-            </a:r>
-          </a:p>
-          <a:p>
-            <a:pPr lvl="0" indent="-457200" marL="457200">
-              <a:buAutoNum type="arabicPeriod"/>
-            </a:pPr>
-            <a:r>
-              <a:rPr/>
-              <a:t>Run the summaries and checker.</a:t>
+              <a:t>[Walk-through steps 10–11]</a:t>
             </a:r>
           </a:p>
         </p:txBody>
@@ -6172,41 +6189,185 @@
             </a:pPr>
             <a:r>
               <a:rPr/>
-              <a:t>18 Turn output into Table 1</a:t>
-            </a:r>
-          </a:p>
-        </p:txBody>
-      </p:sp>
-      <p:pic>
-        <p:nvPicPr>
-          <p:cNvPr descr="APA-style Table 1 with the mean and standard deviation for height difference and counts and percentages for Clark height group and height-gap categories" id="0" name="Picture 1"/>
-          <p:cNvPicPr>
-            <a:picLocks noGrp="1" noChangeAspect="1"/>
-          </p:cNvPicPr>
-          <p:nvPr/>
-        </p:nvPicPr>
-        <p:blipFill>
-          <a:blip r:embed="rId3"/>
-          <a:stretch>
-            <a:fillRect/>
-          </a:stretch>
-        </p:blipFill>
-        <p:spPr bwMode="auto">
-          <a:xfrm>
-            <a:off x="3581400" y="2628900"/>
-            <a:ext cx="5016500" cy="3098800"/>
-          </a:xfrm>
-          <a:prstGeom prst="rect">
-            <a:avLst/>
-          </a:prstGeom>
-          <a:noFill/>
-          <a:ln w="9525">
-            <a:noFill/>
-            <a:headEnd/>
-            <a:tailEnd/>
-          </a:ln>
-        </p:spPr>
-      </p:pic>
+              <a:t>17 Complete Table 1 (continued)</a:t>
+            </a:r>
+          </a:p>
+        </p:txBody>
+      </p:sp>
+      <p:graphicFrame>
+        <p:nvGraphicFramePr>
+          <p:cNvPr id="6" name="Content Placeholder 5"/>
+          <p:cNvGraphicFramePr>
+            <a:graphicFrameLocks noGrp="1"/>
+          </p:cNvGraphicFramePr>
+          <p:nvPr>
+            <p:ph idx="1"/>
+          </p:nvPr>
+        </p:nvGraphicFramePr>
+        <p:xfrm>
+          <a:off x="1092200" y="2628900"/>
+          <a:ext cx="9994900" cy="3098800"/>
+        </p:xfrm>
+        <a:graphic>
+          <a:graphicData uri="http://schemas.openxmlformats.org/drawingml/2006/table">
+            <a:tbl>
+              <a:tblPr firstRow="1" bandRow="1">
+                <a:tableStyleId>{5C22544A-7EE6-4342-B048-85BDC9FD1C3A}</a:tableStyleId>
+              </a:tblPr>
+              <a:tblGrid>
+                <a:gridCol w="4991100"/>
+                <a:gridCol w="4991100"/>
+              </a:tblGrid>
+              <a:tr h="0">
+                <a:tc>
+                  <a:txBody>
+                    <a:bodyPr/>
+                    <a:lstStyle/>
+                    <a:p>
+                      <a:pPr lvl="0" indent="0" marL="0" algn="l">
+                        <a:buNone/>
+                      </a:pPr>
+                      <a:r>
+                        <a:rPr/>
+                        <a:t>Variable</a:t>
+                      </a:r>
+                    </a:p>
+                  </a:txBody>
+                  <a:tcPr/>
+                </a:tc>
+                <a:tc>
+                  <a:txBody>
+                    <a:bodyPr/>
+                    <a:lstStyle/>
+                    <a:p>
+                      <a:pPr lvl="0" indent="0" marL="0" algn="l">
+                        <a:buNone/>
+                      </a:pPr>
+                      <a:r>
+                        <a:rPr/>
+                        <a:t>Report</a:t>
+                      </a:r>
+                    </a:p>
+                  </a:txBody>
+                  <a:tcPr/>
+                </a:tc>
+              </a:tr>
+              <a:tr h="0">
+                <a:tc>
+                  <a:txBody>
+                    <a:bodyPr/>
+                    <a:lstStyle/>
+                    <a:p>
+                      <a:pPr lvl="0" indent="0" marL="0" algn="l">
+                        <a:buNone/>
+                      </a:pPr>
+                      <a:r>
+                        <a:rPr b="1"/>
+                        <a:t>height_diff</a:t>
+                      </a:r>
+                    </a:p>
+                  </a:txBody>
+                </a:tc>
+                <a:tc>
+                  <a:txBody>
+                    <a:bodyPr/>
+                    <a:lstStyle/>
+                    <a:p>
+                      <a:pPr lvl="0" indent="0" marL="0" algn="l">
+                        <a:buNone/>
+                      </a:pPr>
+                      <a:r>
+                        <a:rPr i="1"/>
+                        <a:t>M</a:t>
+                      </a:r>
+                      <a:r>
+                        <a:rPr/>
+                        <a:t> and </a:t>
+                      </a:r>
+                      <a:r>
+                        <a:rPr i="1"/>
+                        <a:t>SD</a:t>
+                      </a:r>
+                    </a:p>
+                  </a:txBody>
+                </a:tc>
+              </a:tr>
+              <a:tr h="0">
+                <a:tc>
+                  <a:txBody>
+                    <a:bodyPr/>
+                    <a:lstStyle/>
+                    <a:p>
+                      <a:pPr lvl="0" indent="0" marL="0" algn="l">
+                        <a:buNone/>
+                      </a:pPr>
+                      <a:r>
+                        <a:rPr b="1"/>
+                        <a:t>clark_grp</a:t>
+                      </a:r>
+                    </a:p>
+                  </a:txBody>
+                </a:tc>
+                <a:tc>
+                  <a:txBody>
+                    <a:bodyPr/>
+                    <a:lstStyle/>
+                    <a:p>
+                      <a:pPr lvl="0" indent="0" marL="0" algn="l">
+                        <a:buNone/>
+                      </a:pPr>
+                      <a:r>
+                        <a:rPr i="1"/>
+                        <a:t>N</a:t>
+                      </a:r>
+                      <a:r>
+                        <a:rPr/>
+                        <a:t> and % for each group</a:t>
+                      </a:r>
+                    </a:p>
+                  </a:txBody>
+                </a:tc>
+              </a:tr>
+              <a:tr h="0">
+                <a:tc>
+                  <a:txBody>
+                    <a:bodyPr/>
+                    <a:lstStyle/>
+                    <a:p>
+                      <a:pPr lvl="0" indent="0" marL="0" algn="l">
+                        <a:buNone/>
+                      </a:pPr>
+                      <a:r>
+                        <a:rPr b="1"/>
+                        <a:t>height_gap</a:t>
+                      </a:r>
+                    </a:p>
+                  </a:txBody>
+                </a:tc>
+                <a:tc>
+                  <a:txBody>
+                    <a:bodyPr/>
+                    <a:lstStyle/>
+                    <a:p>
+                      <a:pPr lvl="0" indent="0" marL="0" algn="l">
+                        <a:buNone/>
+                      </a:pPr>
+                      <a:r>
+                        <a:rPr i="1"/>
+                        <a:t>N</a:t>
+                      </a:r>
+                      <a:r>
+                        <a:rPr/>
+                        <a:t> and % for each category</a:t>
+                      </a:r>
+                    </a:p>
+                  </a:txBody>
+                </a:tc>
+              </a:tr>
+            </a:tbl>
+          </a:graphicData>
+        </a:graphic>
+      </p:graphicFrame>
     </p:spTree>
   </p:cSld>
 </p:sld>
@@ -6254,21 +6415,21 @@
             </a:pPr>
             <a:r>
               <a:rPr/>
-              <a:t>1 Download the Lab 6 files</a:t>
-            </a:r>
-          </a:p>
-        </p:txBody>
-      </p:sp>
-      <p:sp>
-        <p:nvSpPr>
-          <p:cNvPr id="1001" name="card-steel" descr="card: Worksheet. Download worksheet"/>
+              <a:t>1 Open the Lab 06 files</a:t>
+            </a:r>
+          </a:p>
+        </p:txBody>
+      </p:sp>
+      <p:sp>
+        <p:nvSpPr>
+          <p:cNvPr id="1001" name="card-steel" descr="card: Worksheet. Worksheet: lab schedule Homework checker"/>
           <p:cNvSpPr/>
           <p:nvPr/>
         </p:nvSpPr>
         <p:spPr>
           <a:xfrm>
             <a:off x="1097280" y="2633472"/>
-            <a:ext cx="3233928" cy="1005840"/>
+            <a:ext cx="3233928" cy="1615440"/>
           </a:xfrm>
           <a:prstGeom prst="roundRect">
             <a:avLst>
@@ -6309,21 +6470,39 @@
                 </a:solidFill>
                 <a:hlinkClick r:id="rId3"/>
               </a:rPr>
-              <a:t>Download worksheet</a:t>
-            </a:r>
-          </a:p>
-        </p:txBody>
-      </p:sp>
-      <p:sp>
-        <p:nvSpPr>
-          <p:cNvPr id="1002" name="card-rail" descr=""/>
+              <a:t>Worksheet: lab schedule</a:t>
+            </a:r>
+          </a:p>
+          <a:p>
+            <a:pPr algn="l"/>
+            <a:r>
+              <a:rPr lang="en-US" sz="2000" b="0" dirty="0">
+                <a:solidFill>
+                  <a:srgbClr val="010B13"/>
+                </a:solidFill>
+                <a:hlinkClick r:id="rId4"/>
+              </a:rPr>
+              <a:t>Homework checker</a:t>
+            </a:r>
+          </a:p>
+        </p:txBody>
+      </p:sp>
+      <p:sp>
+        <p:nvSpPr>
+          <p:cNvPr id="1002" name="card-rail" descr="">
+            <a:extLst>
+              <a:ext uri="{C183D7F6-B498-43B3-948B-1728B52AA6E4}">
+                <adec:decorative xmlns:adec="http://schemas.microsoft.com/office/drawing/2017/decorative" val="1"/>
+              </a:ext>
+            </a:extLst>
+          </p:cNvPr>
           <p:cNvSpPr/>
           <p:nvPr/>
         </p:nvSpPr>
         <p:spPr>
           <a:xfrm>
             <a:off x="1097280" y="2633472"/>
-            <a:ext cx="54864" cy="1005840"/>
+            <a:ext cx="54864" cy="1615440"/>
           </a:xfrm>
           <a:prstGeom prst="roundRect">
             <a:avLst>
@@ -6347,14 +6526,14 @@
       </p:sp>
       <p:sp>
         <p:nvSpPr>
-          <p:cNvPr id="1003" name="card-steel" descr="card: Enter and transform. Data entry guide Compute and recode guide"/>
+          <p:cNvPr id="1003" name="card-steel" descr="card: Enter and transform. Data entry guide Transform guide"/>
           <p:cNvSpPr/>
           <p:nvPr/>
         </p:nvSpPr>
         <p:spPr>
           <a:xfrm>
             <a:off x="4477512" y="2633472"/>
-            <a:ext cx="3233928" cy="1950720"/>
+            <a:ext cx="3233928" cy="1645920"/>
           </a:xfrm>
           <a:prstGeom prst="roundRect">
             <a:avLst>
@@ -6393,7 +6572,7 @@
                 <a:solidFill>
                   <a:srgbClr val="010B13"/>
                 </a:solidFill>
-                <a:hlinkClick r:id="rId4"/>
+                <a:hlinkClick r:id="rId5"/>
               </a:rPr>
               <a:t>Data entry guide</a:t>
             </a:r>
@@ -6405,23 +6584,29 @@
                 <a:solidFill>
                   <a:srgbClr val="010B13"/>
                 </a:solidFill>
-                <a:hlinkClick r:id="rId5"/>
+                <a:hlinkClick r:id="rId6"/>
               </a:rPr>
-              <a:t>Compute and recode guide</a:t>
-            </a:r>
-          </a:p>
-        </p:txBody>
-      </p:sp>
-      <p:sp>
-        <p:nvSpPr>
-          <p:cNvPr id="1004" name="card-rail" descr=""/>
+              <a:t>Transform guide</a:t>
+            </a:r>
+          </a:p>
+        </p:txBody>
+      </p:sp>
+      <p:sp>
+        <p:nvSpPr>
+          <p:cNvPr id="1004" name="card-rail" descr="">
+            <a:extLst>
+              <a:ext uri="{C183D7F6-B498-43B3-948B-1728B52AA6E4}">
+                <adec:decorative xmlns:adec="http://schemas.microsoft.com/office/drawing/2017/decorative" val="1"/>
+              </a:ext>
+            </a:extLst>
+          </p:cNvPr>
           <p:cNvSpPr/>
           <p:nvPr/>
         </p:nvSpPr>
         <p:spPr>
           <a:xfrm>
             <a:off x="4477512" y="2633472"/>
-            <a:ext cx="54864" cy="1950720"/>
+            <a:ext cx="54864" cy="1645920"/>
           </a:xfrm>
           <a:prstGeom prst="roundRect">
             <a:avLst>
@@ -6491,7 +6676,7 @@
                 <a:solidFill>
                   <a:srgbClr val="010B13"/>
                 </a:solidFill>
-                <a:hlinkClick r:id="rId6"/>
+                <a:hlinkClick r:id="rId7"/>
               </a:rPr>
               <a:t>Select cases guide</a:t>
             </a:r>
@@ -6503,7 +6688,7 @@
                 <a:solidFill>
                   <a:srgbClr val="010B13"/>
                 </a:solidFill>
-                <a:hlinkClick r:id="rId7"/>
+                <a:hlinkClick r:id="rId8"/>
               </a:rPr>
               <a:t>Univariate guide</a:t>
             </a:r>
@@ -6512,7 +6697,13 @@
       </p:sp>
       <p:sp>
         <p:nvSpPr>
-          <p:cNvPr id="1006" name="card-rail" descr=""/>
+          <p:cNvPr id="1006" name="card-rail" descr="">
+            <a:extLst>
+              <a:ext uri="{C183D7F6-B498-43B3-948B-1728B52AA6E4}">
+                <adec:decorative xmlns:adec="http://schemas.microsoft.com/office/drawing/2017/decorative" val="1"/>
+              </a:ext>
+            </a:extLst>
+          </p:cNvPr>
           <p:cNvSpPr/>
           <p:nvPr/>
         </p:nvSpPr>
@@ -6588,7 +6779,237 @@
             </a:pPr>
             <a:r>
               <a:rPr/>
-              <a:t>19 Finish Table 2 and proof</a:t>
+              <a:t>17 Complete Table 1 (continued 2)</a:t>
+            </a:r>
+          </a:p>
+        </p:txBody>
+      </p:sp>
+      <p:sp>
+        <p:nvSpPr>
+          <p:cNvPr id="3" name="Content Placeholder 2"/>
+          <p:cNvSpPr>
+            <a:spLocks noGrp="1"/>
+          </p:cNvSpPr>
+          <p:nvPr>
+            <p:ph idx="1"/>
+          </p:nvPr>
+        </p:nvSpPr>
+        <p:spPr/>
+        <p:txBody>
+          <a:bodyPr/>
+          <a:lstStyle/>
+          <a:p>
+            <a:pPr lvl="0" indent="0" marL="0">
+              <a:buNone/>
+            </a:pPr>
+            <a:r>
+              <a:rPr/>
+              <a:t>Reset to </a:t>
+            </a:r>
+            <a:r>
+              <a:rPr b="1"/>
+              <a:t>All cases</a:t>
+            </a:r>
+            <a:r>
+              <a:rPr/>
+              <a:t>, then save data and syntax</a:t>
+            </a:r>
+          </a:p>
+        </p:txBody>
+      </p:sp>
+    </p:spTree>
+  </p:cSld>
+</p:sld>
+</file>
+
+<file path=ppt/slides/slide21.xml><?xml version="1.0" encoding="utf-8"?>
+<p:sld xmlns:a="http://schemas.openxmlformats.org/drawingml/2006/main" xmlns:r="http://schemas.openxmlformats.org/officeDocument/2006/relationships" xmlns:p="http://schemas.openxmlformats.org/presentationml/2006/main">
+  <p:cSld>
+    <p:spTree>
+      <p:nvGrpSpPr>
+        <p:cNvPr id="1" name=""/>
+        <p:cNvGrpSpPr/>
+        <p:nvPr/>
+      </p:nvGrpSpPr>
+      <p:grpSpPr>
+        <a:xfrm>
+          <a:off x="0" y="0"/>
+          <a:ext cx="0" cy="0"/>
+          <a:chOff x="0" y="0"/>
+          <a:chExt cx="0" cy="0"/>
+        </a:xfrm>
+      </p:grpSpPr>
+      <p:sp>
+        <p:nvSpPr>
+          <p:cNvPr id="2" name="Title 1"/>
+          <p:cNvSpPr>
+            <a:spLocks noGrp="1"/>
+          </p:cNvSpPr>
+          <p:nvPr>
+            <p:ph type="title"/>
+          </p:nvPr>
+        </p:nvSpPr>
+        <p:spPr>
+          <a:xfrm>
+            <a:off x="1097280" y="964692"/>
+            <a:ext cx="9997440" cy="1188720"/>
+          </a:xfrm>
+        </p:spPr>
+        <p:txBody>
+          <a:bodyPr/>
+          <a:lstStyle/>
+          <a:p>
+            <a:pPr lvl="0" indent="0" marL="0">
+              <a:buNone/>
+            </a:pPr>
+            <a:r>
+              <a:rPr/>
+              <a:t>18 Add the take-home variables</a:t>
+            </a:r>
+          </a:p>
+        </p:txBody>
+      </p:sp>
+      <p:sp>
+        <p:nvSpPr>
+          <p:cNvPr id="3" name="Content Placeholder 2"/>
+          <p:cNvSpPr>
+            <a:spLocks noGrp="1"/>
+          </p:cNvSpPr>
+          <p:nvPr>
+            <p:ph idx="1"/>
+          </p:nvPr>
+        </p:nvSpPr>
+        <p:spPr/>
+        <p:txBody>
+          <a:bodyPr/>
+          <a:lstStyle/>
+          <a:p>
+            <a:pPr lvl="0" indent="0" marL="0">
+              <a:buNone/>
+            </a:pPr>
+            <a:r>
+              <a:rPr/>
+              <a:t>[Take-home steps 1–8]</a:t>
+            </a:r>
+          </a:p>
+          <a:p>
+            <a:pPr lvl="0" indent="-457200" marL="457200">
+              <a:buAutoNum type="arabicPeriod"/>
+            </a:pPr>
+            <a:r>
+              <a:rPr/>
+              <a:t>Add the ratings variables to your saved data</a:t>
+            </a:r>
+          </a:p>
+          <a:p>
+            <a:pPr lvl="0" indent="-457200" marL="457200">
+              <a:buAutoNum type="arabicPeriod"/>
+            </a:pPr>
+            <a:r>
+              <a:rPr/>
+              <a:t>Create </a:t>
+            </a:r>
+            <a:r>
+              <a:rPr b="1"/>
+              <a:t>tomatometer</a:t>
+            </a:r>
+            <a:r>
+              <a:rPr/>
+              <a:t>, </a:t>
+            </a:r>
+            <a:r>
+              <a:rPr b="1"/>
+              <a:t>rt_avg</a:t>
+            </a:r>
+            <a:r>
+              <a:rPr/>
+              <a:t>, </a:t>
+            </a:r>
+            <a:r>
+              <a:rPr b="1"/>
+              <a:t>rt_diff</a:t>
+            </a:r>
+            <a:r>
+              <a:rPr/>
+              <a:t>, then </a:t>
+            </a:r>
+            <a:r>
+              <a:rPr b="1"/>
+              <a:t>popular</a:t>
+            </a:r>
+          </a:p>
+          <a:p>
+            <a:pPr lvl="0" indent="-457200" marL="457200">
+              <a:buAutoNum type="arabicPeriod"/>
+            </a:pPr>
+            <a:r>
+              <a:rPr/>
+              <a:t>Select cases with </a:t>
+            </a:r>
+            <a:r>
+              <a:rPr b="1"/>
+              <a:t>rt_critics_count ≥ 5</a:t>
+            </a:r>
+          </a:p>
+          <a:p>
+            <a:pPr lvl="0" indent="-457200" marL="457200">
+              <a:buAutoNum type="arabicPeriod"/>
+            </a:pPr>
+            <a:r>
+              <a:rPr/>
+              <a:t>Run the summaries and complete the take-home checker</a:t>
+            </a:r>
+          </a:p>
+        </p:txBody>
+      </p:sp>
+    </p:spTree>
+  </p:cSld>
+</p:sld>
+</file>
+
+<file path=ppt/slides/slide22.xml><?xml version="1.0" encoding="utf-8"?>
+<p:sld xmlns:a="http://schemas.openxmlformats.org/drawingml/2006/main" xmlns:r="http://schemas.openxmlformats.org/officeDocument/2006/relationships" xmlns:p="http://schemas.openxmlformats.org/presentationml/2006/main">
+  <p:cSld>
+    <p:spTree>
+      <p:nvGrpSpPr>
+        <p:cNvPr id="1" name=""/>
+        <p:cNvGrpSpPr/>
+        <p:nvPr/>
+      </p:nvGrpSpPr>
+      <p:grpSpPr>
+        <a:xfrm>
+          <a:off x="0" y="0"/>
+          <a:ext cx="0" cy="0"/>
+          <a:chOff x="0" y="0"/>
+          <a:chExt cx="0" cy="0"/>
+        </a:xfrm>
+      </p:grpSpPr>
+      <p:sp>
+        <p:nvSpPr>
+          <p:cNvPr id="2" name="Title 1"/>
+          <p:cNvSpPr>
+            <a:spLocks noGrp="1"/>
+          </p:cNvSpPr>
+          <p:nvPr>
+            <p:ph type="title"/>
+          </p:nvPr>
+        </p:nvSpPr>
+        <p:spPr>
+          <a:xfrm>
+            <a:off x="1097280" y="964692"/>
+            <a:ext cx="9997440" cy="1188720"/>
+          </a:xfrm>
+        </p:spPr>
+        <p:txBody>
+          <a:bodyPr/>
+          <a:lstStyle/>
+          <a:p>
+            <a:pPr lvl="0" indent="0" marL="0">
+              <a:buNone/>
+            </a:pPr>
+            <a:r>
+              <a:rPr/>
+              <a:t>19 Finish Table 2 and the checker</a:t>
             </a:r>
           </a:p>
         </p:txBody>
@@ -6641,10 +7062,6 @@
               <a:rPr b="1"/>
               <a:t>rt_diff</a:t>
             </a:r>
-            <a:r>
-              <a:rPr/>
-              <a:t>.</a:t>
-            </a:r>
           </a:p>
           <a:p>
             <a:pPr lvl="0"/>
@@ -6672,16 +7089,16 @@
               <a:rPr b="1"/>
               <a:t>popular</a:t>
             </a:r>
+          </a:p>
+          <a:p>
+            <a:pPr lvl="0"/>
             <a:r>
               <a:rPr/>
-              <a:t>.</a:t>
-            </a:r>
-          </a:p>
-          <a:p>
-            <a:pPr lvl="0"/>
-            <a:r>
-              <a:rPr/>
-              <a:t>Paste the all-green checker screenshot into the worksheet.</a:t>
+              <a:t>Include checker screenshots with all answers correct for </a:t>
+            </a:r>
+            <a:r>
+              <a:rPr b="1"/>
+              <a:t>both sections</a:t>
             </a:r>
           </a:p>
           <a:p>
@@ -6696,7 +7113,7 @@
             </a:r>
             <a:r>
               <a:rPr/>
-              <a:t>, then save data and syntax.</a:t>
+              <a:t>, then save data and syntax</a:t>
             </a:r>
           </a:p>
         </p:txBody>
@@ -6733,7 +7150,12 @@
             <p:ph type="title"/>
           </p:nvPr>
         </p:nvSpPr>
-        <p:spPr/>
+        <p:spPr>
+          <a:xfrm>
+            <a:off x="1097280" y="964692"/>
+            <a:ext cx="9997440" cy="1188720"/>
+          </a:xfrm>
+        </p:spPr>
         <p:txBody>
           <a:bodyPr/>
           <a:lstStyle/>
@@ -6789,8 +7211,8 @@
         </p:blipFill>
         <p:spPr bwMode="auto">
           <a:xfrm>
-            <a:off x="1574800" y="3416300"/>
-            <a:ext cx="4267200" cy="2032000"/>
+            <a:off x="1092200" y="3340100"/>
+            <a:ext cx="4902200" cy="2324100"/>
           </a:xfrm>
           <a:prstGeom prst="rect">
             <a:avLst/>
@@ -6869,8 +7291,8 @@
         </p:blipFill>
         <p:spPr bwMode="auto">
           <a:xfrm>
-            <a:off x="6337300" y="3429000"/>
-            <a:ext cx="4241800" cy="2006600"/>
+            <a:off x="6184900" y="3352800"/>
+            <a:ext cx="4902200" cy="2311400"/>
           </a:xfrm>
           <a:prstGeom prst="rect">
             <a:avLst/>
@@ -6955,14 +7377,14 @@
             </a:pPr>
             <a:r>
               <a:rPr/>
-              <a:t>3 Read results in Output Viewer</a:t>
+              <a:t>3 Find results in Output Viewer</a:t>
             </a:r>
           </a:p>
         </p:txBody>
       </p:sp>
       <p:pic>
         <p:nvPicPr>
-          <p:cNvPr descr="SPSS-style Statistics output for height difference after the walkthrough filter, showing 7 valid cases, 2 missing cases, a mean of 8.21 inches, and a standard deviation of 2.65 inches" id="0" name="Picture 1"/>
+          <p:cNvPr descr="Height difference after filtering: 7 valid cases and 2 missing; mean 8.21 inches, standard error 1.000, SD 2.645, minimum 5.12, maximum 12.99" id="0" name="Picture 1"/>
           <p:cNvPicPr>
             <a:picLocks noGrp="1" noChangeAspect="1"/>
           </p:cNvPicPr>
@@ -7022,7 +7444,12 @@
             <p:ph type="title"/>
           </p:nvPr>
         </p:nvSpPr>
-        <p:spPr/>
+        <p:spPr>
+          <a:xfrm>
+            <a:off x="1097280" y="964692"/>
+            <a:ext cx="9997440" cy="1188720"/>
+          </a:xfrm>
+        </p:spPr>
         <p:txBody>
           <a:bodyPr/>
           <a:lstStyle/>
@@ -7099,8 +7526,8 @@
         </p:blipFill>
         <p:spPr bwMode="auto">
           <a:xfrm>
-            <a:off x="1574800" y="3416300"/>
-            <a:ext cx="4267200" cy="2032000"/>
+            <a:off x="1092200" y="3340100"/>
+            <a:ext cx="4902200" cy="2324100"/>
           </a:xfrm>
           <a:prstGeom prst="rect">
             <a:avLst/>
@@ -7175,8 +7602,8 @@
         </p:blipFill>
         <p:spPr bwMode="auto">
           <a:xfrm>
-            <a:off x="6337300" y="3429000"/>
-            <a:ext cx="4241800" cy="2019300"/>
+            <a:off x="6184900" y="3340100"/>
+            <a:ext cx="4902200" cy="2324100"/>
           </a:xfrm>
           <a:prstGeom prst="rect">
             <a:avLst/>
@@ -7221,7 +7648,12 @@
             <p:ph type="title"/>
           </p:nvPr>
         </p:nvSpPr>
-        <p:spPr/>
+        <p:spPr>
+          <a:xfrm>
+            <a:off x="1097280" y="964692"/>
+            <a:ext cx="9997440" cy="1188720"/>
+          </a:xfrm>
+        </p:spPr>
         <p:txBody>
           <a:bodyPr/>
           <a:lstStyle/>
@@ -7231,7 +7663,7 @@
             </a:pPr>
             <a:r>
               <a:rPr/>
-              <a:t>5 Two habits prevent SPSS panic</a:t>
+              <a:t>5 Keep the guide and syntax handy</a:t>
             </a:r>
           </a:p>
         </p:txBody>
@@ -7277,8 +7709,8 @@
         </p:blipFill>
         <p:spPr bwMode="auto">
           <a:xfrm>
-            <a:off x="1968500" y="3136900"/>
-            <a:ext cx="3479800" cy="2590800"/>
+            <a:off x="1409700" y="2921000"/>
+            <a:ext cx="4267200" cy="3175000"/>
           </a:xfrm>
           <a:prstGeom prst="rect">
             <a:avLst/>
@@ -7332,8 +7764,8 @@
         </p:blipFill>
         <p:spPr bwMode="auto">
           <a:xfrm>
-            <a:off x="7239000" y="3136900"/>
-            <a:ext cx="2438400" cy="2590800"/>
+            <a:off x="7150100" y="2921000"/>
+            <a:ext cx="2984500" cy="3175000"/>
           </a:xfrm>
           <a:prstGeom prst="rect">
             <a:avLst/>
@@ -7393,7 +7825,7 @@
             </a:pPr>
             <a:r>
               <a:rPr/>
-              <a:t>6 Build data in four moves</a:t>
+              <a:t>6 Check each change as you work</a:t>
             </a:r>
           </a:p>
         </p:txBody>
@@ -7422,7 +7854,7 @@
             </a:r>
             <a:r>
               <a:rPr/>
-              <a:t> variables and missing values.</a:t>
+              <a:t> variables and missing values</a:t>
             </a:r>
           </a:p>
           <a:p>
@@ -7435,7 +7867,7 @@
             </a:r>
             <a:r>
               <a:rPr/>
-              <a:t> one row per case.</a:t>
+              <a:t> one row per case</a:t>
             </a:r>
           </a:p>
           <a:p>
@@ -7448,7 +7880,7 @@
             </a:r>
             <a:r>
               <a:rPr/>
-              <a:t> into new variables.</a:t>
+              <a:t> into new variables</a:t>
             </a:r>
           </a:p>
           <a:p>
@@ -7461,7 +7893,7 @@
             </a:r>
             <a:r>
               <a:rPr/>
-              <a:t> each change before continuing.</a:t>
+              <a:t> each change before continuing</a:t>
             </a:r>
           </a:p>
         </p:txBody>
@@ -7518,103 +7950,208 @@
           </a:p>
         </p:txBody>
       </p:sp>
-      <p:pic>
-        <p:nvPicPr>
-          <p:cNvPr descr="The same height values shown as a quantitative measure and as recoded categories" id="0" name="Picture 1"/>
-          <p:cNvPicPr>
-            <a:picLocks noGrp="1" noChangeAspect="1"/>
-          </p:cNvPicPr>
+      <p:sp>
+        <p:nvSpPr>
+          <p:cNvPr id="1007" name="card-steel" descr="card: Quantitative. Report M and SD Example: height in inches"/>
+          <p:cNvSpPr/>
           <p:nvPr/>
-        </p:nvPicPr>
-        <p:blipFill>
-          <a:blip r:embed="rId3"/>
-          <a:stretch>
-            <a:fillRect/>
-          </a:stretch>
-        </p:blipFill>
-        <p:spPr bwMode="auto">
+        </p:nvSpPr>
+        <p:spPr>
           <a:xfrm>
-            <a:off x="1092200" y="2667000"/>
-            <a:ext cx="4902200" cy="3022600"/>
+            <a:off x="1097280" y="2633472"/>
+            <a:ext cx="4924044" cy="1310640"/>
           </a:xfrm>
-          <a:prstGeom prst="rect">
-            <a:avLst/>
+          <a:prstGeom prst="roundRect">
+            <a:avLst>
+              <a:gd name="adj" fmla="val 6000"/>
+            </a:avLst>
           </a:prstGeom>
-          <a:noFill/>
-          <a:ln w="9525">
-            <a:noFill/>
-            <a:headEnd/>
-            <a:tailEnd/>
+          <a:solidFill>
+            <a:srgbClr val="FEFDFA"/>
+          </a:solidFill>
+          <a:ln w="19050">
+            <a:solidFill>
+              <a:srgbClr val="CCCCCC"/>
+            </a:solidFill>
           </a:ln>
         </p:spPr>
-      </p:pic>
-      <p:sp>
-        <p:nvSpPr>
-          <p:cNvPr id="4" name="Content Placeholder 3"/>
-          <p:cNvSpPr>
-            <a:spLocks noGrp="1"/>
-          </p:cNvSpPr>
-          <p:nvPr>
-            <p:ph idx="2" sz="half"/>
-          </p:nvPr>
-        </p:nvSpPr>
-        <p:spPr/>
-        <p:txBody>
-          <a:bodyPr/>
-          <a:lstStyle/>
-          <a:p>
-            <a:pPr lvl="0"/>
-            <a:r>
-              <a:rPr b="1"/>
-              <a:t>Quantitative:</a:t>
-            </a:r>
-            <a:r>
-              <a:rPr/>
-              <a:t> report </a:t>
-            </a:r>
-            <a:r>
-              <a:rPr i="1"/>
-              <a:t>M</a:t>
-            </a:r>
-            <a:r>
-              <a:rPr/>
-              <a:t> and </a:t>
-            </a:r>
-            <a:r>
-              <a:rPr i="1"/>
-              <a:t>SD</a:t>
-            </a:r>
-            <a:r>
-              <a:rPr/>
-              <a:t>.</a:t>
-            </a:r>
-          </a:p>
-          <a:p>
-            <a:pPr lvl="0"/>
-            <a:r>
-              <a:rPr b="1"/>
-              <a:t>Categorical:</a:t>
-            </a:r>
-            <a:r>
-              <a:rPr/>
-              <a:t> report </a:t>
-            </a:r>
-            <a:r>
-              <a:rPr i="1"/>
-              <a:t>N</a:t>
-            </a:r>
-            <a:r>
-              <a:rPr/>
-              <a:t> and %.</a:t>
-            </a:r>
-          </a:p>
-          <a:p>
-            <a:pPr lvl="0"/>
-            <a:r>
-              <a:rPr/>
-              <a:t>Numeric codes can still represent categories.</a:t>
-            </a:r>
-          </a:p>
+        <p:txBody>
+          <a:bodyPr lIns="182880" tIns="182880" rIns="182880" bIns="182880" anchor="t" wrap="square">
+            <a:normAutofit/>
+          </a:bodyPr>
+          <a:lstStyle/>
+          <a:p>
+            <a:pPr algn="l"/>
+            <a:r>
+              <a:rPr lang="en-US" sz="2200" b="1" dirty="0">
+                <a:solidFill>
+                  <a:srgbClr val="010B13"/>
+                </a:solidFill>
+              </a:rPr>
+              <a:t>Quantitative</a:t>
+            </a:r>
+          </a:p>
+          <a:p>
+            <a:pPr algn="l"/>
+            <a:r>
+              <a:rPr lang="en-US" sz="2000" b="0" dirty="0">
+                <a:solidFill>
+                  <a:srgbClr val="010B13"/>
+                </a:solidFill>
+              </a:rPr>
+              <a:t>Report M and SD</a:t>
+            </a:r>
+          </a:p>
+          <a:p>
+            <a:pPr algn="l"/>
+            <a:r>
+              <a:rPr lang="en-US" sz="2000" b="0" dirty="0">
+                <a:solidFill>
+                  <a:srgbClr val="010B13"/>
+                </a:solidFill>
+              </a:rPr>
+              <a:t>Example: height in inches</a:t>
+            </a:r>
+          </a:p>
+        </p:txBody>
+      </p:sp>
+      <p:sp>
+        <p:nvSpPr>
+          <p:cNvPr id="1008" name="card-rail" descr="">
+            <a:extLst>
+              <a:ext uri="{C183D7F6-B498-43B3-948B-1728B52AA6E4}">
+                <adec:decorative xmlns:adec="http://schemas.microsoft.com/office/drawing/2017/decorative" val="1"/>
+              </a:ext>
+            </a:extLst>
+          </p:cNvPr>
+          <p:cNvSpPr/>
+          <p:nvPr/>
+        </p:nvSpPr>
+        <p:spPr>
+          <a:xfrm>
+            <a:off x="1097280" y="2633472"/>
+            <a:ext cx="54864" cy="1310640"/>
+          </a:xfrm>
+          <a:prstGeom prst="roundRect">
+            <a:avLst>
+              <a:gd name="adj" fmla="val 20000"/>
+            </a:avLst>
+          </a:prstGeom>
+          <a:solidFill>
+            <a:srgbClr val="010B13"/>
+          </a:solidFill>
+          <a:ln>
+            <a:noFill/>
+          </a:ln>
+        </p:spPr>
+        <p:txBody>
+          <a:bodyPr lIns="182880" tIns="182880" rIns="182880" bIns="182880" anchor="t" wrap="square">
+            <a:normAutofit/>
+          </a:bodyPr>
+          <a:lstStyle/>
+          <a:p/>
+        </p:txBody>
+      </p:sp>
+      <p:sp>
+        <p:nvSpPr>
+          <p:cNvPr id="1009" name="card-steel" descr="card: Categorical. Report N and % for each category Example: type of media"/>
+          <p:cNvSpPr/>
+          <p:nvPr/>
+        </p:nvSpPr>
+        <p:spPr>
+          <a:xfrm>
+            <a:off x="6167628" y="2633472"/>
+            <a:ext cx="4924044" cy="1615440"/>
+          </a:xfrm>
+          <a:prstGeom prst="roundRect">
+            <a:avLst>
+              <a:gd name="adj" fmla="val 6000"/>
+            </a:avLst>
+          </a:prstGeom>
+          <a:solidFill>
+            <a:srgbClr val="FEFDFA"/>
+          </a:solidFill>
+          <a:ln w="19050">
+            <a:solidFill>
+              <a:srgbClr val="CCCCCC"/>
+            </a:solidFill>
+          </a:ln>
+        </p:spPr>
+        <p:txBody>
+          <a:bodyPr lIns="182880" tIns="182880" rIns="182880" bIns="182880" anchor="t" wrap="square">
+            <a:normAutofit/>
+          </a:bodyPr>
+          <a:lstStyle/>
+          <a:p>
+            <a:pPr algn="l"/>
+            <a:r>
+              <a:rPr lang="en-US" sz="2200" b="1" dirty="0">
+                <a:solidFill>
+                  <a:srgbClr val="010B13"/>
+                </a:solidFill>
+              </a:rPr>
+              <a:t>Categorical</a:t>
+            </a:r>
+          </a:p>
+          <a:p>
+            <a:pPr algn="l"/>
+            <a:r>
+              <a:rPr lang="en-US" sz="2000" b="0" dirty="0">
+                <a:solidFill>
+                  <a:srgbClr val="010B13"/>
+                </a:solidFill>
+              </a:rPr>
+              <a:t>Report N and % for each category</a:t>
+            </a:r>
+          </a:p>
+          <a:p>
+            <a:pPr algn="l"/>
+            <a:r>
+              <a:rPr lang="en-US" sz="2000" b="0" dirty="0">
+                <a:solidFill>
+                  <a:srgbClr val="010B13"/>
+                </a:solidFill>
+              </a:rPr>
+              <a:t>Example: type of media</a:t>
+            </a:r>
+          </a:p>
+        </p:txBody>
+      </p:sp>
+      <p:sp>
+        <p:nvSpPr>
+          <p:cNvPr id="1010" name="card-rail" descr="">
+            <a:extLst>
+              <a:ext uri="{C183D7F6-B498-43B3-948B-1728B52AA6E4}">
+                <adec:decorative xmlns:adec="http://schemas.microsoft.com/office/drawing/2017/decorative" val="1"/>
+              </a:ext>
+            </a:extLst>
+          </p:cNvPr>
+          <p:cNvSpPr/>
+          <p:nvPr/>
+        </p:nvSpPr>
+        <p:spPr>
+          <a:xfrm>
+            <a:off x="6167628" y="2633472"/>
+            <a:ext cx="54864" cy="1615440"/>
+          </a:xfrm>
+          <a:prstGeom prst="roundRect">
+            <a:avLst>
+              <a:gd name="adj" fmla="val 20000"/>
+            </a:avLst>
+          </a:prstGeom>
+          <a:solidFill>
+            <a:srgbClr val="010B13"/>
+          </a:solidFill>
+          <a:ln>
+            <a:noFill/>
+          </a:ln>
+        </p:spPr>
+        <p:txBody>
+          <a:bodyPr lIns="182880" tIns="182880" rIns="182880" bIns="182880" anchor="t" wrap="square">
+            <a:normAutofit/>
+          </a:bodyPr>
+          <a:lstStyle/>
+          <a:p/>
         </p:txBody>
       </p:sp>
     </p:spTree>
